--- a/dashboard_econ_num/rapport/Presentation_Economie_Numerique_Togo.pptx
+++ b/dashboard_econ_num/rapport/Presentation_Economie_Numerique_Togo.pptx
@@ -4352,7 +4352,7 @@
                 </a:solidFill>
                 <a:latin typeface="Calibri"/>
               </a:rPr>
-              <a:t>•  8 onglets interactifs, filtres region/prefecture.</a:t>
+              <a:t>•  8 onglets, filtres jusqu au canton.</a:t>
             </a:r>
           </a:p>
           <a:p>

--- a/dashboard_econ_num/rapport/Presentation_Economie_Numerique_Togo.pptx
+++ b/dashboard_econ_num/rapport/Presentation_Economie_Numerique_Togo.pptx
@@ -4261,7 +4261,7 @@
                   <a:srgbClr val="6B7B76"/>
                 </a:solidFill>
               </a:rPr>
-              <a:t>📷 Capture d'ecran du tableau de bord
+              <a:t>[ ] Capture d'ecran du tableau de bord
 (page d'accueil — a inserer)</a:t>
             </a:r>
           </a:p>
@@ -7500,7 +7500,7 @@
                   <a:srgbClr val="6B7B76"/>
                 </a:solidFill>
               </a:rPr>
-              <a:t>📷 Capture : carte des priorites
+              <a:t>[ ] Capture : carte des priorites
 (onglet « Carte » du dashboard)</a:t>
             </a:r>
           </a:p>
